--- a/public/fun/pack/pptx/newspro/카드뉴스프리미엄_30_오늘의한마디_임페리얼퍼플.pptx
+++ b/public/fun/pack/pptx/newspro/카드뉴스프리미엄_30_오늘의한마디_임페리얼퍼플.pptx
@@ -113,12 +113,12 @@
   <p:extLst>
     <p:ext uri="{521415D9-36F7-43E2-AB2F-B90AF26B5E84}">
       <p14:sectionLst xmlns:p14="http://schemas.microsoft.com/office/powerpoint/2010/main">
-        <p14:section name="시작" id="{FD369C60-FC03-45C3-8B6A-339CDF91665A}">
+        <p14:section name="시작" id="{EF110964-D72F-4242-BDE6-DD41E72065A9}">
           <p14:sldIdLst>
             <p14:sldId id="256"/>
           </p14:sldIdLst>
         </p14:section>
-        <p14:section name="본문" id="{19600600-F494-4EB2-9553-A80B81881569}">
+        <p14:section name="본문" id="{B48F2270-FBA0-4799-A17C-B9406CCB7809}">
           <p14:sldIdLst>
             <p14:sldId id="257"/>
             <p14:sldId id="258"/>
@@ -127,7 +127,7 @@
             <p14:sldId id="261"/>
           </p14:sldIdLst>
         </p14:section>
-        <p14:section name="마무리" id="{2C83B386-2248-4A9F-BF7A-CD4D0FA8224A}">
+        <p14:section name="마무리" id="{B6E00497-08A7-44A4-B6BA-2C951EBAD164}">
           <p14:sldIdLst>
             <p14:sldId id="262"/>
           </p14:sldIdLst>
@@ -1607,7 +1607,7 @@
             </a:lvl1pPr>
           </a:lstStyle>
           <a:p>
-            <a:fld id="{C6C84C6E-2642-4347-9804-8A260FF846E8}" type="slidenum">
+            <a:fld id="{2A5FF1F7-68C8-45D0-B905-4BCD1E0E6D9A}" type="slidenum">
               <a:rPr lang="en-US"/>
               <a:t>‹#›</a:t>
             </a:fld>
@@ -2422,7 +2422,7 @@
             </a:lvl1pPr>
           </a:lstStyle>
           <a:p>
-            <a:fld id="{5FFC2DBE-2A25-4686-AB4E-C4C5422D9CB8}" type="slidenum">
+            <a:fld id="{E297BB19-183F-4B58-A769-769C3AE2802D}" type="slidenum">
               <a:rPr lang="en-US"/>
               <a:t>‹#›</a:t>
             </a:fld>
@@ -3168,7 +3168,7 @@
             </a:lvl1pPr>
           </a:lstStyle>
           <a:p>
-            <a:fld id="{416A374B-5C40-42A7-A294-4755B7C2699C}" type="slidenum">
+            <a:fld id="{CE85C719-96D4-4824-B74C-EDB1F67B5BC0}" type="slidenum">
               <a:rPr lang="en-US"/>
               <a:t>‹#›</a:t>
             </a:fld>
@@ -4160,7 +4160,7 @@
           <a:bodyPr/>
           <a:lstStyle/>
           <a:p>
-            <a:fld id="{38A6A744-7755-4730-B65D-D839B4EFF59D}" type="slidenum">
+            <a:fld id="{1C3CE63D-19ED-4768-BD88-241C12C1BB0D}" type="slidenum">
               <a:rPr lang="en-US"/>
               <a:t>‹#›</a:t>
             </a:fld>
@@ -4348,7 +4348,7 @@
           <a:bodyPr/>
           <a:lstStyle/>
           <a:p>
-            <a:fld id="{F5248633-A8C5-4338-8338-54ECE725AA39}" type="slidenum">
+            <a:fld id="{AF905EA8-54BB-4E7B-BF59-0330313C9B54}" type="slidenum">
               <a:rPr lang="en-US"/>
               <a:t>‹#›</a:t>
             </a:fld>
@@ -4536,7 +4536,7 @@
           <a:bodyPr/>
           <a:lstStyle/>
           <a:p>
-            <a:fld id="{9FA2BF93-AABC-4886-840C-6B62231D5A77}" type="slidenum">
+            <a:fld id="{870A7784-C719-4B21-968F-71DB4ECF80D6}" type="slidenum">
               <a:rPr lang="en-US"/>
               <a:t>‹#›</a:t>
             </a:fld>
@@ -4724,7 +4724,7 @@
           <a:bodyPr/>
           <a:lstStyle/>
           <a:p>
-            <a:fld id="{DBB2FD7E-345E-4603-BE18-5A8501CEDCA2}" type="slidenum">
+            <a:fld id="{E6ED30BC-4386-4CAF-8372-7D05E373ACD6}" type="slidenum">
               <a:rPr lang="en-US"/>
               <a:t>‹#›</a:t>
             </a:fld>
@@ -4912,7 +4912,7 @@
           <a:bodyPr/>
           <a:lstStyle/>
           <a:p>
-            <a:fld id="{45663C31-1268-457A-898B-59F3F56EB245}" type="slidenum">
+            <a:fld id="{DA7B1025-79D1-451F-8A28-D922B46BFF9B}" type="slidenum">
               <a:rPr lang="en-US"/>
               <a:t>‹#›</a:t>
             </a:fld>
